--- a/AI 問い合わせアプリ.pptx
+++ b/AI 問い合わせアプリ.pptx
@@ -3747,7 +3747,7 @@
         <p:spPr>
           <a:xfrm>
             <a:off x="320674" y="1924651"/>
-            <a:ext cx="11502357" cy="2862322"/>
+            <a:ext cx="11502357" cy="2554545"/>
           </a:xfrm>
           <a:prstGeom prst="rect">
             <a:avLst/>
@@ -3761,18 +3761,15 @@
           <a:lstStyle/>
           <a:p>
             <a:r>
-              <a:rPr kumimoji="1" lang="ja-JP" altLang="en-US" sz="2000" dirty="0"/>
-              <a:t>従来は業務内の問い合わせが口頭で行われた。</a:t>
-            </a:r>
-            <a:endParaRPr kumimoji="1" lang="en-US" altLang="ja-JP" sz="2000" dirty="0"/>
-          </a:p>
-          <a:p>
-            <a:endParaRPr kumimoji="1" lang="en-US" altLang="ja-JP" sz="2000" dirty="0"/>
-          </a:p>
-          <a:p>
-            <a:r>
               <a:rPr lang="ja-JP" altLang="en-US" sz="2000" dirty="0"/>
-              <a:t>そのため、管理できず、過去回答の参照が困難であった。</a:t>
+              <a:t>従来、業務内の問い合わせは口頭で行われており、</a:t>
+            </a:r>
+            <a:br>
+              <a:rPr lang="ja-JP" altLang="en-US" sz="2000" dirty="0"/>
+            </a:br>
+            <a:r>
+              <a:rPr lang="ja-JP" altLang="en-US" sz="2000" dirty="0"/>
+              <a:t>内容が記録されないため、過去の回答参照や情報管理が困難であった。</a:t>
             </a:r>
             <a:endParaRPr lang="en-US" altLang="ja-JP" sz="2000" dirty="0"/>
           </a:p>
@@ -3783,6 +3780,17 @@
             <a:r>
               <a:rPr lang="ja-JP" altLang="en-US" sz="2000" dirty="0"/>
               <a:t>本システムでは、問い合わせ内容を一元管理し、</a:t>
+            </a:r>
+            <a:endParaRPr lang="en-US" altLang="ja-JP" sz="2000" dirty="0"/>
+          </a:p>
+          <a:p>
+            <a:r>
+              <a:rPr lang="en-US" altLang="ja-JP" sz="2000" dirty="0"/>
+              <a:t>Gemini AI </a:t>
+            </a:r>
+            <a:r>
+              <a:rPr lang="ja-JP" altLang="en-US" sz="2000" dirty="0"/>
+              <a:t>により以下を自動で判定・生成する。</a:t>
             </a:r>
             <a:endParaRPr lang="en-US" altLang="ja-JP" sz="2000" dirty="0"/>
           </a:p>
@@ -3793,7 +3801,7 @@
             </a:pPr>
             <a:r>
               <a:rPr lang="ja-JP" altLang="en-US" sz="2000" dirty="0"/>
-              <a:t>カテゴリー</a:t>
+              <a:t>カテゴリー分類</a:t>
             </a:r>
             <a:endParaRPr lang="en-US" altLang="ja-JP" sz="2000" dirty="0"/>
           </a:p>
@@ -3804,7 +3812,7 @@
             </a:pPr>
             <a:r>
               <a:rPr lang="ja-JP" altLang="en-US" sz="2000" dirty="0"/>
-              <a:t>緊急度</a:t>
+              <a:t>緊急度判定</a:t>
             </a:r>
             <a:endParaRPr lang="en-US" altLang="ja-JP" sz="2000" dirty="0"/>
           </a:p>
@@ -3815,26 +3823,7 @@
             </a:pPr>
             <a:r>
               <a:rPr lang="ja-JP" altLang="en-US" sz="2000" dirty="0"/>
-              <a:t>回答案　</a:t>
-            </a:r>
-            <a:endParaRPr lang="en-US" altLang="ja-JP" sz="2000" dirty="0"/>
-          </a:p>
-          <a:p>
-            <a:r>
-              <a:rPr lang="en-US" altLang="ja-JP" sz="2000" dirty="0"/>
-              <a:t>Gemini</a:t>
-            </a:r>
-            <a:r>
-              <a:rPr lang="ja-JP" altLang="en-US" sz="2000" dirty="0"/>
-              <a:t> </a:t>
-            </a:r>
-            <a:r>
-              <a:rPr lang="en-US" altLang="ja-JP" sz="2000" dirty="0"/>
-              <a:t>AI </a:t>
-            </a:r>
-            <a:r>
-              <a:rPr lang="ja-JP" altLang="en-US" sz="2000" dirty="0"/>
-              <a:t>によって自動判定を行う</a:t>
+              <a:t>回答案生成</a:t>
             </a:r>
             <a:endParaRPr lang="en-US" altLang="ja-JP" sz="2000" dirty="0"/>
           </a:p>
@@ -4060,7 +4049,7 @@
         </p:nvSpPr>
         <p:spPr>
           <a:xfrm>
-            <a:off x="320675" y="1972778"/>
+            <a:off x="320675" y="1870630"/>
             <a:ext cx="11352212" cy="4708981"/>
           </a:xfrm>
           <a:prstGeom prst="rect">
@@ -4084,6 +4073,16 @@
             <a:endParaRPr lang="en-US" altLang="ja-JP" sz="2000" dirty="0"/>
           </a:p>
           <a:p>
+            <a:pPr marL="457200" indent="-457200">
+              <a:buAutoNum type="arabicPeriod"/>
+            </a:pPr>
+            <a:endParaRPr lang="en-US" altLang="ja-JP" sz="2000" dirty="0"/>
+          </a:p>
+          <a:p>
+            <a:r>
+              <a:rPr lang="ja-JP" altLang="en-US" sz="2000" dirty="0"/>
+              <a:t>本システムは、以下の画面で構成される。</a:t>
+            </a:r>
             <a:endParaRPr lang="en-US" altLang="ja-JP" sz="2000" dirty="0"/>
           </a:p>
           <a:p>
@@ -4093,7 +4092,7 @@
             </a:pPr>
             <a:r>
               <a:rPr lang="ja-JP" altLang="en-US" sz="2000" dirty="0"/>
-              <a:t>サイドバー</a:t>
+              <a:t>サイドバー（画面遷移メニュー）</a:t>
             </a:r>
             <a:endParaRPr lang="en-US" altLang="ja-JP" sz="2000" dirty="0"/>
           </a:p>
@@ -4135,64 +4134,64 @@
             <a:endParaRPr lang="en-US" altLang="ja-JP" sz="2000" dirty="0"/>
           </a:p>
           <a:p>
+            <a:pPr marL="342900" indent="-342900">
+              <a:buFont typeface="Wingdings" panose="05000000000000000000" pitchFamily="2" charset="2"/>
+              <a:buChar char="l"/>
+            </a:pPr>
             <a:endParaRPr lang="en-US" altLang="ja-JP" sz="2000" dirty="0"/>
           </a:p>
           <a:p>
             <a:r>
-              <a:rPr lang="en-US" altLang="ja-JP" sz="2000" dirty="0" err="1"/>
-              <a:t>FastAPI</a:t>
-            </a:r>
-            <a:r>
-              <a:rPr lang="en-US" altLang="ja-JP" sz="2000" dirty="0"/>
-              <a:t> </a:t>
-            </a:r>
-            <a:r>
               <a:rPr lang="ja-JP" altLang="en-US" sz="2000" dirty="0"/>
-              <a:t>を起動し、</a:t>
-            </a:r>
-            <a:r>
-              <a:rPr lang="en-US" altLang="ja-JP" sz="2000" dirty="0">
-                <a:hlinkClick r:id="rId2"/>
-              </a:rPr>
-              <a:t>http://localhost:8501</a:t>
-            </a:r>
-            <a:r>
-              <a:rPr lang="en-US" altLang="ja-JP" sz="2000" dirty="0"/>
-              <a:t> </a:t>
-            </a:r>
+              <a:t>画面遷移</a:t>
+            </a:r>
+            <a:endParaRPr lang="en-US" altLang="ja-JP" sz="2000" dirty="0"/>
+          </a:p>
+          <a:p>
+            <a:endParaRPr lang="en-US" altLang="ja-JP" sz="2000" dirty="0"/>
+          </a:p>
+          <a:p>
             <a:r>
               <a:rPr lang="ja-JP" altLang="en-US" sz="2000" dirty="0"/>
-              <a:t>を開いたら、問い合わせ入力画面が表示される</a:t>
+              <a:t>初期表示は「問い合わせ入力画面」とし、</a:t>
             </a:r>
             <a:endParaRPr lang="en-US" altLang="ja-JP" sz="2000" dirty="0"/>
           </a:p>
           <a:p>
+            <a:r>
+              <a:rPr lang="ja-JP" altLang="en-US" sz="2000" dirty="0"/>
+              <a:t>サイドバー操作により各画面へ遷移する。</a:t>
+            </a:r>
             <a:endParaRPr lang="en-US" altLang="ja-JP" sz="2000" dirty="0"/>
           </a:p>
           <a:p>
+            <a:pPr marL="342900" indent="-342900">
+              <a:buFont typeface="Wingdings" panose="05000000000000000000" pitchFamily="2" charset="2"/>
+              <a:buChar char="l"/>
+            </a:pPr>
             <a:r>
               <a:rPr lang="ja-JP" altLang="en-US" sz="2000" dirty="0"/>
-              <a:t>問い合わせ入力画面からサイドバーを開き、一覧画面へ遷移して「詳細」ボタンから詳細画面を表示できる</a:t>
-            </a:r>
-            <a:endParaRPr lang="en-US" altLang="ja-JP" sz="2000" dirty="0"/>
-          </a:p>
-          <a:p>
-            <a:endParaRPr lang="en-US" altLang="ja-JP" sz="2000" dirty="0"/>
-          </a:p>
-          <a:p>
+              <a:t>入力画面 → 一覧画面 → 詳細画面へ遷移可能</a:t>
+            </a:r>
+          </a:p>
+          <a:p>
+            <a:pPr marL="342900" indent="-342900">
+              <a:buFont typeface="Wingdings" panose="05000000000000000000" pitchFamily="2" charset="2"/>
+              <a:buChar char="l"/>
+            </a:pPr>
             <a:r>
               <a:rPr lang="ja-JP" altLang="en-US" sz="2000" dirty="0"/>
-              <a:t>詳細画面からは一覧画面へ戻る＊</a:t>
-            </a:r>
-            <a:endParaRPr lang="en-US" altLang="ja-JP" sz="2000" dirty="0"/>
-          </a:p>
-          <a:p>
-            <a:endParaRPr lang="en-US" altLang="ja-JP" sz="2000" dirty="0"/>
-          </a:p>
-          <a:p>
+              <a:t>詳細画面から一覧画面へ戻ることができる</a:t>
+            </a:r>
+          </a:p>
+          <a:p>
+            <a:pPr marL="342900" indent="-342900">
+              <a:buFont typeface="Wingdings" panose="05000000000000000000" pitchFamily="2" charset="2"/>
+              <a:buChar char="l"/>
+            </a:pPr>
             <a:r>
               <a:rPr lang="ja-JP" altLang="en-US" sz="2000" dirty="0"/>
-              <a:t>一覧画面および詳細画面から、サイドバーを通じて問い合わせ入力画面へ遷移できる</a:t>
+              <a:t>すべての画面から入力画面へ遷移可能</a:t>
             </a:r>
             <a:endParaRPr lang="en-US" altLang="ja-JP" sz="2000" dirty="0"/>
           </a:p>
@@ -4357,8 +4356,8 @@
         </p:nvSpPr>
         <p:spPr>
           <a:xfrm>
-            <a:off x="320675" y="1924652"/>
-            <a:ext cx="9140566" cy="4093428"/>
+            <a:off x="320674" y="1924651"/>
+            <a:ext cx="11871325" cy="3477875"/>
           </a:xfrm>
           <a:prstGeom prst="rect">
             <a:avLst/>
@@ -4438,7 +4437,7 @@
             </a:pPr>
             <a:r>
               <a:rPr lang="ja-JP" altLang="en-US" sz="2000" dirty="0"/>
-              <a:t>ユーザー（社員）が問い合わせ内容のテキストエリアにキーボードから問い合わせ入力する</a:t>
+              <a:t>ユーザー（社員）が問い合わせ内容をテキストエリアに入力する。</a:t>
             </a:r>
             <a:endParaRPr lang="en-US" altLang="ja-JP" sz="2000" dirty="0"/>
           </a:p>
@@ -4448,20 +4447,16 @@
               <a:buChar char="l"/>
             </a:pPr>
             <a:r>
+              <a:rPr lang="ja-JP" altLang="en-US" sz="2000" dirty="0"/>
+              <a:t>入力された内容は</a:t>
+            </a:r>
+            <a:r>
               <a:rPr lang="en-US" altLang="ja-JP" sz="2000" dirty="0"/>
-              <a:t>Gemini</a:t>
+              <a:t>Gemini AI</a:t>
             </a:r>
             <a:r>
               <a:rPr lang="ja-JP" altLang="en-US" sz="2000" dirty="0"/>
-              <a:t> </a:t>
-            </a:r>
-            <a:r>
-              <a:rPr lang="en-US" altLang="ja-JP" sz="2000" dirty="0"/>
-              <a:t>AI </a:t>
-            </a:r>
-            <a:r>
-              <a:rPr lang="ja-JP" altLang="en-US" sz="2000" dirty="0"/>
-              <a:t>によって、カテゴリー（</a:t>
+              <a:t>に送信され、カテゴリー（</a:t>
             </a:r>
             <a:r>
               <a:rPr lang="en-US" altLang="ja-JP" sz="2000" dirty="0"/>
@@ -4487,28 +4482,8 @@
               <a:buChar char="l"/>
             </a:pPr>
             <a:r>
-              <a:rPr lang="en-US" altLang="ja-JP" sz="2000" dirty="0"/>
-              <a:t>Gemini</a:t>
-            </a:r>
-            <a:r>
               <a:rPr lang="ja-JP" altLang="en-US" sz="2000" dirty="0"/>
-              <a:t> </a:t>
-            </a:r>
-            <a:r>
-              <a:rPr lang="en-US" altLang="ja-JP" sz="2000" dirty="0"/>
-              <a:t>AI </a:t>
-            </a:r>
-            <a:r>
-              <a:rPr lang="ja-JP" altLang="en-US" sz="2000" dirty="0"/>
-              <a:t>の回答をローカル</a:t>
-            </a:r>
-            <a:r>
-              <a:rPr lang="en-US" altLang="ja-JP" sz="2000" dirty="0"/>
-              <a:t>PC </a:t>
-            </a:r>
-            <a:r>
-              <a:rPr lang="ja-JP" altLang="en-US" sz="2000" dirty="0"/>
-              <a:t>の </a:t>
+              <a:t>生成結果はローカル環境の</a:t>
             </a:r>
             <a:r>
               <a:rPr lang="en-US" altLang="ja-JP" sz="2000" dirty="0"/>
@@ -4524,16 +4499,62 @@
             </a:r>
             <a:r>
               <a:rPr lang="ja-JP" altLang="en-US" sz="2000" dirty="0"/>
-              <a:t>で一元管理する　</a:t>
+              <a:t>に保存され、一元管理される。</a:t>
             </a:r>
             <a:endParaRPr lang="en-US" altLang="ja-JP" sz="2000" dirty="0"/>
           </a:p>
-          <a:p>
-            <a:pPr marL="342900" indent="-342900">
-              <a:buFont typeface="Wingdings" panose="05000000000000000000" pitchFamily="2" charset="2"/>
-              <a:buChar char="l"/>
-            </a:pPr>
-            <a:endParaRPr lang="en-US" altLang="ja-JP" sz="2000" dirty="0"/>
+        </p:txBody>
+      </p:sp>
+      <p:sp>
+        <p:nvSpPr>
+          <p:cNvPr id="13" name="テキスト ボックス 12">
+            <a:extLst>
+              <a:ext uri="{FF2B5EF4-FFF2-40B4-BE49-F238E27FC236}">
+                <a16:creationId xmlns:a16="http://schemas.microsoft.com/office/drawing/2014/main" id="{0A835375-E8F5-AABF-0154-618279D89C6A}"/>
+              </a:ext>
+            </a:extLst>
+          </p:cNvPr>
+          <p:cNvSpPr txBox="1"/>
+          <p:nvPr/>
+        </p:nvSpPr>
+        <p:spPr>
+          <a:xfrm>
+            <a:off x="714261" y="6117946"/>
+            <a:ext cx="10565040" cy="461665"/>
+          </a:xfrm>
+          <a:prstGeom prst="rect">
+            <a:avLst/>
+          </a:prstGeom>
+          <a:noFill/>
+        </p:spPr>
+        <p:txBody>
+          <a:bodyPr wrap="square" rtlCol="0">
+            <a:spAutoFit/>
+          </a:bodyPr>
+          <a:lstStyle/>
+          <a:p>
+            <a:pPr algn="ctr"/>
+            <a:r>
+              <a:rPr lang="en-US" altLang="ja-JP" sz="2400" b="1" dirty="0">
+                <a:solidFill>
+                  <a:srgbClr val="FF0000"/>
+                </a:solidFill>
+              </a:rPr>
+              <a:t>*</a:t>
+            </a:r>
+            <a:r>
+              <a:rPr lang="ja-JP" altLang="en-US" sz="2400" b="1" dirty="0">
+                <a:solidFill>
+                  <a:srgbClr val="FF0000"/>
+                </a:solidFill>
+              </a:rPr>
+              <a:t>過去の回答は永続的に保存され、参照可能となる</a:t>
+            </a:r>
+            <a:endParaRPr kumimoji="1" lang="ja-JP" altLang="en-US" sz="2400" b="1" dirty="0">
+              <a:solidFill>
+                <a:srgbClr val="FF0000"/>
+              </a:solidFill>
+            </a:endParaRPr>
           </a:p>
         </p:txBody>
       </p:sp>
@@ -4737,7 +4758,7 @@
             </a:pPr>
             <a:r>
               <a:rPr lang="ja-JP" altLang="en-US" sz="2000" dirty="0"/>
-              <a:t>サイドバーの方から「一覧表示」ラジオボタンで遷移する</a:t>
+              <a:t>サイドバーの「一覧表示」から遷移することで表示される。</a:t>
             </a:r>
             <a:endParaRPr lang="en-US" altLang="ja-JP" sz="2000" dirty="0"/>
           </a:p>
@@ -4748,15 +4769,15 @@
             </a:pPr>
             <a:r>
               <a:rPr lang="ja-JP" altLang="en-US" sz="2000" dirty="0"/>
-              <a:t>問い合わせ一覧を </a:t>
+              <a:t>問い合わせ一覧をテーブル形式（</a:t>
             </a:r>
             <a:r>
               <a:rPr lang="en-US" altLang="ja-JP" sz="2000" dirty="0"/>
-              <a:t>column </a:t>
+              <a:t>column</a:t>
             </a:r>
             <a:r>
               <a:rPr lang="ja-JP" altLang="en-US" sz="2000" dirty="0"/>
-              <a:t>で表示する</a:t>
+              <a:t>・カラム表示）で表示する。</a:t>
             </a:r>
             <a:endParaRPr lang="en-US" altLang="ja-JP" sz="2000" dirty="0"/>
           </a:p>
@@ -4767,7 +4788,7 @@
             </a:pPr>
             <a:r>
               <a:rPr lang="ja-JP" altLang="en-US" sz="2000" dirty="0"/>
-              <a:t>表の中で</a:t>
+              <a:t>表示項目</a:t>
             </a:r>
             <a:endParaRPr lang="en-US" altLang="ja-JP" sz="2000" dirty="0"/>
           </a:p>
@@ -4788,7 +4809,7 @@
                 <a:effectLst/>
                 <a:latin typeface="游ゴシック" panose="020B0400000000000000" pitchFamily="50" charset="-128"/>
               </a:rPr>
-              <a:t>整数・自動採番</a:t>
+              <a:t>整数（自動採番）</a:t>
             </a:r>
             <a:r>
               <a:rPr lang="ja-JP" altLang="en-US" sz="1800" b="0" i="0" dirty="0">
@@ -4863,6 +4884,13 @@
               <a:t>形式（</a:t>
             </a:r>
             <a:r>
+              <a:rPr lang="ja-JP" altLang="en-US" sz="1800" b="0" i="0" dirty="0">
+                <a:effectLst/>
+                <a:latin typeface="游ゴシック" panose="020B0400000000000000" pitchFamily="50" charset="-128"/>
+              </a:rPr>
+              <a:t>例：</a:t>
+            </a:r>
+            <a:r>
               <a:rPr lang="en-US" altLang="ja-JP" sz="1800" b="0" i="0" dirty="0">
                 <a:solidFill>
                   <a:srgbClr val="215F9A"/>
@@ -5053,11 +5081,8 @@
               <a:t> : </a:t>
             </a:r>
             <a:r>
-              <a:rPr lang="en-US" altLang="ja-JP" sz="1800" b="0" i="0" dirty="0" err="1">
-                <a:effectLst/>
-                <a:latin typeface="游ゴシック" panose="020B0400000000000000" pitchFamily="50" charset="-128"/>
-              </a:rPr>
-              <a:t>詳細画面へ遷移する</a:t>
+              <a:rPr lang="ja-JP" altLang="en-US" dirty="0"/>
+              <a:t>押下で詳細画面へ遷移</a:t>
             </a:r>
             <a:endParaRPr lang="en-US" altLang="ja-JP" sz="2000" dirty="0"/>
           </a:p>
@@ -5222,8 +5247,8 @@
         </p:nvSpPr>
         <p:spPr>
           <a:xfrm>
-            <a:off x="320675" y="1924652"/>
-            <a:ext cx="10748378" cy="4093428"/>
+            <a:off x="320675" y="1702583"/>
+            <a:ext cx="10748378" cy="5324535"/>
           </a:xfrm>
           <a:prstGeom prst="rect">
             <a:avLst/>
@@ -5236,9 +5261,10 @@
           </a:bodyPr>
           <a:lstStyle/>
           <a:p>
-            <a:pPr marL="457200" indent="-457200">
-              <a:buAutoNum type="arabicPeriod"/>
-            </a:pPr>
+            <a:r>
+              <a:rPr lang="en-US" altLang="ja-JP" sz="2000" dirty="0"/>
+              <a:t>2.    </a:t>
+            </a:r>
             <a:r>
               <a:rPr lang="ja-JP" altLang="en-US" sz="2000" dirty="0"/>
               <a:t>画面ごとの操作</a:t>
@@ -5262,22 +5288,15 @@
             </a:pPr>
             <a:r>
               <a:rPr lang="ja-JP" altLang="en-US" sz="2000" dirty="0"/>
-              <a:t>一覧表示画面から 選択した </a:t>
+              <a:t>一覧表示画面から選択した</a:t>
             </a:r>
             <a:r>
               <a:rPr lang="en-US" altLang="ja-JP" sz="2000" dirty="0"/>
-              <a:t>ID </a:t>
+              <a:t>ID</a:t>
             </a:r>
             <a:r>
               <a:rPr lang="ja-JP" altLang="en-US" sz="2000" dirty="0"/>
-              <a:t>の「詳細」ボタンを押し、</a:t>
-            </a:r>
-            <a:endParaRPr lang="en-US" altLang="ja-JP" sz="2000" dirty="0"/>
-          </a:p>
-          <a:p>
-            <a:r>
-              <a:rPr lang="ja-JP" altLang="en-US" sz="2000" dirty="0"/>
-              <a:t>　問い合わせ詳細画面を表示する</a:t>
+              <a:t>の「詳細」ボタンを押下することで表示される。</a:t>
             </a:r>
             <a:endParaRPr lang="en-US" altLang="ja-JP" sz="2000" dirty="0"/>
           </a:p>
@@ -5288,7 +5307,18 @@
             </a:pPr>
             <a:r>
               <a:rPr lang="ja-JP" altLang="en-US" sz="2000" dirty="0"/>
-              <a:t>問い合わせ内容を</a:t>
+              <a:t>選択された問い合わせの詳細情報を順番に閲覧できる。</a:t>
+            </a:r>
+            <a:endParaRPr lang="en-US" altLang="ja-JP" sz="2000" dirty="0"/>
+          </a:p>
+          <a:p>
+            <a:pPr marL="342900" indent="-342900">
+              <a:buFont typeface="Wingdings" panose="05000000000000000000" pitchFamily="2" charset="2"/>
+              <a:buChar char="l"/>
+            </a:pPr>
+            <a:r>
+              <a:rPr lang="ja-JP" altLang="en-US" sz="2000" dirty="0"/>
+              <a:t>表示内容</a:t>
             </a:r>
             <a:endParaRPr lang="en-US" altLang="ja-JP" sz="2000" dirty="0"/>
           </a:p>
@@ -5358,10 +5388,48 @@
             <a:endParaRPr lang="en-US" altLang="ja-JP" sz="2000" dirty="0"/>
           </a:p>
           <a:p>
+            <a:pPr marL="800100" lvl="1" indent="-342900">
+              <a:buFont typeface="Wingdings" panose="05000000000000000000" pitchFamily="2" charset="2"/>
+              <a:buChar char="Ø"/>
+            </a:pPr>
+            <a:endParaRPr lang="en-US" altLang="ja-JP" sz="2000" dirty="0"/>
+          </a:p>
+          <a:p>
+            <a:r>
+              <a:rPr lang="ja-JP" altLang="en-US" sz="2000" dirty="0"/>
+              <a:t>補足</a:t>
+            </a:r>
+          </a:p>
+          <a:p>
             <a:pPr marL="342900" indent="-342900">
               <a:buFont typeface="Wingdings" panose="05000000000000000000" pitchFamily="2" charset="2"/>
               <a:buChar char="l"/>
             </a:pPr>
+            <a:r>
+              <a:rPr lang="ja-JP" altLang="en-US" sz="2000" dirty="0"/>
+              <a:t>一覧画面の選択レコードに紐づく詳細情報を表示する </a:t>
+            </a:r>
+          </a:p>
+          <a:p>
+            <a:pPr marL="342900" indent="-342900">
+              <a:buFont typeface="Wingdings" panose="05000000000000000000" pitchFamily="2" charset="2"/>
+              <a:buChar char="l"/>
+            </a:pPr>
+            <a:r>
+              <a:rPr lang="ja-JP" altLang="en-US" sz="2000" dirty="0"/>
+              <a:t>問い合わせ</a:t>
+            </a:r>
+            <a:r>
+              <a:rPr lang="en-US" altLang="ja-JP" sz="2000" dirty="0"/>
+              <a:t>1</a:t>
+            </a:r>
+            <a:r>
+              <a:rPr lang="ja-JP" altLang="en-US" sz="2000" dirty="0"/>
+              <a:t>件ごとの全情報を確認可能</a:t>
+            </a:r>
+          </a:p>
+          <a:p>
+            <a:pPr lvl="1"/>
             <a:endParaRPr lang="en-US" altLang="ja-JP" sz="2000" dirty="0"/>
           </a:p>
         </p:txBody>
@@ -5513,10 +5581,10 @@
       </p:sp>
       <p:sp>
         <p:nvSpPr>
-          <p:cNvPr id="8" name="テキスト ボックス 7">
-            <a:extLst>
-              <a:ext uri="{FF2B5EF4-FFF2-40B4-BE49-F238E27FC236}">
-                <a16:creationId xmlns:a16="http://schemas.microsoft.com/office/drawing/2014/main" id="{263F92A8-8339-37C5-FB27-E92865B65C93}"/>
+          <p:cNvPr id="9" name="テキスト ボックス 8">
+            <a:extLst>
+              <a:ext uri="{FF2B5EF4-FFF2-40B4-BE49-F238E27FC236}">
+                <a16:creationId xmlns:a16="http://schemas.microsoft.com/office/drawing/2014/main" id="{5258E596-E3BF-3504-7093-EFBE310000F6}"/>
               </a:ext>
             </a:extLst>
           </p:cNvPr>
@@ -5525,8 +5593,8 @@
         </p:nvSpPr>
         <p:spPr>
           <a:xfrm>
-            <a:off x="320675" y="1924651"/>
-            <a:ext cx="9140566" cy="5016758"/>
+            <a:off x="320675" y="2024861"/>
+            <a:ext cx="10668000" cy="4524315"/>
           </a:xfrm>
           <a:prstGeom prst="rect">
             <a:avLst/>
@@ -5540,203 +5608,169 @@
           <a:lstStyle/>
           <a:p>
             <a:r>
-              <a:rPr lang="en-US" altLang="ja-JP" sz="2000" dirty="0"/>
-              <a:t>2. </a:t>
-            </a:r>
-            <a:r>
-              <a:rPr lang="ja-JP" altLang="en-US" sz="2000" dirty="0"/>
-              <a:t>バックエンド・</a:t>
-            </a:r>
-            <a:r>
-              <a:rPr lang="en-US" altLang="ja-JP" sz="2000" dirty="0"/>
-              <a:t>AI </a:t>
-            </a:r>
-            <a:r>
-              <a:rPr lang="ja-JP" altLang="en-US" sz="2000" dirty="0"/>
-              <a:t>機能</a:t>
-            </a:r>
-            <a:endParaRPr lang="en-US" altLang="ja-JP" sz="2000" dirty="0"/>
-          </a:p>
-          <a:p>
-            <a:endParaRPr lang="en-US" altLang="ja-JP" sz="2000" dirty="0"/>
-          </a:p>
-          <a:p>
-            <a:pPr marL="342900" indent="-342900">
+              <a:rPr kumimoji="1" lang="ja-JP" altLang="en-US" dirty="0"/>
+              <a:t>バックエンド（</a:t>
+            </a:r>
+            <a:r>
+              <a:rPr kumimoji="1" lang="en-US" altLang="ja-JP" dirty="0" err="1"/>
+              <a:t>FastAPI</a:t>
+            </a:r>
+            <a:r>
+              <a:rPr kumimoji="1" lang="ja-JP" altLang="en-US" dirty="0"/>
+              <a:t>）</a:t>
+            </a:r>
+          </a:p>
+          <a:p>
+            <a:endParaRPr kumimoji="1" lang="ja-JP" altLang="en-US" dirty="0"/>
+          </a:p>
+          <a:p>
+            <a:r>
+              <a:rPr kumimoji="1" lang="en-US" altLang="ja-JP" dirty="0" err="1"/>
+              <a:t>FastAPI</a:t>
+            </a:r>
+            <a:r>
+              <a:rPr kumimoji="1" lang="ja-JP" altLang="en-US" dirty="0"/>
+              <a:t>を用いて、以下の</a:t>
+            </a:r>
+            <a:r>
+              <a:rPr kumimoji="1" lang="en-US" altLang="ja-JP" dirty="0"/>
+              <a:t>REST API</a:t>
+            </a:r>
+            <a:r>
+              <a:rPr kumimoji="1" lang="ja-JP" altLang="en-US" dirty="0"/>
+              <a:t>を実装する。</a:t>
+            </a:r>
+          </a:p>
+          <a:p>
+            <a:pPr marL="285750" indent="-285750">
               <a:buFont typeface="Wingdings" panose="05000000000000000000" pitchFamily="2" charset="2"/>
               <a:buChar char="l"/>
             </a:pPr>
-            <a:r>
-              <a:rPr lang="en-US" altLang="ja-JP" sz="2000" dirty="0" err="1"/>
-              <a:t>FastAPI</a:t>
-            </a:r>
-            <a:r>
-              <a:rPr lang="en-US" altLang="ja-JP" sz="2000" dirty="0"/>
-              <a:t> </a:t>
-            </a:r>
-            <a:r>
-              <a:rPr lang="ja-JP" altLang="en-US" sz="2000" dirty="0"/>
-              <a:t>を用いた </a:t>
-            </a:r>
-            <a:r>
-              <a:rPr lang="en-US" altLang="ja-JP" sz="2000" dirty="0"/>
-              <a:t>POST/GET </a:t>
-            </a:r>
-            <a:r>
-              <a:rPr lang="ja-JP" altLang="en-US" sz="2000" dirty="0"/>
-              <a:t>の実装</a:t>
-            </a:r>
-            <a:endParaRPr lang="en-US" altLang="ja-JP" sz="2000" dirty="0"/>
-          </a:p>
-          <a:p>
-            <a:pPr marL="342900" indent="-342900">
+            <a:endParaRPr kumimoji="1" lang="ja-JP" altLang="en-US" dirty="0"/>
+          </a:p>
+          <a:p>
+            <a:pPr marL="285750" indent="-285750">
               <a:buFont typeface="Wingdings" panose="05000000000000000000" pitchFamily="2" charset="2"/>
               <a:buChar char="l"/>
             </a:pPr>
-            <a:endParaRPr lang="en-US" altLang="ja-JP" sz="2000" dirty="0"/>
-          </a:p>
-          <a:p>
-            <a:pPr marL="342900" indent="-342900">
+            <a:r>
+              <a:rPr kumimoji="1" lang="en-US" altLang="ja-JP" dirty="0"/>
+              <a:t>POST / GET </a:t>
+            </a:r>
+            <a:r>
+              <a:rPr kumimoji="1" lang="ja-JP" altLang="en-US" dirty="0"/>
+              <a:t>による問い合わせ管理機能</a:t>
+            </a:r>
+          </a:p>
+          <a:p>
+            <a:pPr marL="285750" indent="-285750">
               <a:buFont typeface="Wingdings" panose="05000000000000000000" pitchFamily="2" charset="2"/>
               <a:buChar char="l"/>
             </a:pPr>
             <a:r>
-              <a:rPr lang="en-US" altLang="ja-JP" sz="2000" dirty="0"/>
-              <a:t>Gemini</a:t>
-            </a:r>
-            <a:r>
-              <a:rPr lang="ja-JP" altLang="en-US" sz="2000" dirty="0"/>
-              <a:t> </a:t>
-            </a:r>
-            <a:r>
-              <a:rPr lang="en-US" altLang="ja-JP" sz="2000" dirty="0"/>
-              <a:t>API </a:t>
-            </a:r>
-            <a:r>
-              <a:rPr lang="ja-JP" altLang="en-US" sz="2000" dirty="0"/>
-              <a:t>による問い合わせ内容の</a:t>
-            </a:r>
-            <a:r>
-              <a:rPr lang="en-US" altLang="ja-JP" sz="2000" dirty="0"/>
-              <a:t>AI</a:t>
-            </a:r>
-            <a:r>
-              <a:rPr lang="ja-JP" altLang="en-US" sz="2000" dirty="0"/>
-              <a:t>分析</a:t>
-            </a:r>
-            <a:endParaRPr lang="en-US" altLang="ja-JP" sz="2000" dirty="0"/>
-          </a:p>
-          <a:p>
-            <a:pPr marL="342900" indent="-342900">
+              <a:rPr kumimoji="1" lang="ja-JP" altLang="en-US" dirty="0"/>
+              <a:t>問い合わせ情報の登録・取得（一覧・詳細）</a:t>
+            </a:r>
+          </a:p>
+          <a:p>
+            <a:pPr marL="285750" indent="-285750">
               <a:buFont typeface="Wingdings" panose="05000000000000000000" pitchFamily="2" charset="2"/>
               <a:buChar char="l"/>
             </a:pPr>
-            <a:endParaRPr lang="en-US" altLang="ja-JP" sz="2000" dirty="0"/>
-          </a:p>
-          <a:p>
-            <a:pPr marL="342900" indent="-342900">
+            <a:r>
+              <a:rPr kumimoji="1" lang="en-US" altLang="ja-JP" dirty="0"/>
+              <a:t>JSON </a:t>
+            </a:r>
+            <a:r>
+              <a:rPr kumimoji="1" lang="ja-JP" altLang="en-US" dirty="0"/>
+              <a:t>形式でのデータ処理およびバリデーション</a:t>
+            </a:r>
+          </a:p>
+          <a:p>
+            <a:pPr marL="285750" indent="-285750">
               <a:buFont typeface="Wingdings" panose="05000000000000000000" pitchFamily="2" charset="2"/>
               <a:buChar char="l"/>
             </a:pPr>
             <a:r>
-              <a:rPr lang="ja-JP" altLang="en-US" sz="2000" dirty="0"/>
-              <a:t>問い合わせカテゴリー・緊急度の自動判定</a:t>
-            </a:r>
-            <a:endParaRPr lang="en-US" altLang="ja-JP" sz="2000" dirty="0"/>
-          </a:p>
-          <a:p>
-            <a:pPr marL="342900" indent="-342900">
+              <a:rPr kumimoji="1" lang="ja-JP" altLang="en-US" dirty="0"/>
+              <a:t>エラーハンドリングによる安全な</a:t>
+            </a:r>
+            <a:r>
+              <a:rPr kumimoji="1" lang="en-US" altLang="ja-JP" dirty="0"/>
+              <a:t>API</a:t>
+            </a:r>
+            <a:r>
+              <a:rPr kumimoji="1" lang="ja-JP" altLang="en-US" dirty="0"/>
+              <a:t>処理</a:t>
+            </a:r>
+            <a:endParaRPr kumimoji="1" lang="en-US" altLang="ja-JP" dirty="0"/>
+          </a:p>
+          <a:p>
+            <a:endParaRPr kumimoji="1" lang="ja-JP" altLang="en-US" dirty="0"/>
+          </a:p>
+          <a:p>
+            <a:r>
+              <a:rPr kumimoji="1" lang="en-US" altLang="ja-JP" dirty="0"/>
+              <a:t>AI</a:t>
+            </a:r>
+            <a:r>
+              <a:rPr kumimoji="1" lang="ja-JP" altLang="en-US" dirty="0"/>
+              <a:t>機能（</a:t>
+            </a:r>
+            <a:r>
+              <a:rPr kumimoji="1" lang="en-US" altLang="ja-JP" dirty="0"/>
+              <a:t>Gemini API</a:t>
+            </a:r>
+            <a:r>
+              <a:rPr kumimoji="1" lang="ja-JP" altLang="en-US" dirty="0"/>
+              <a:t>）</a:t>
+            </a:r>
+          </a:p>
+          <a:p>
+            <a:endParaRPr kumimoji="1" lang="ja-JP" altLang="en-US" dirty="0"/>
+          </a:p>
+          <a:p>
+            <a:r>
+              <a:rPr kumimoji="1" lang="en-US" altLang="ja-JP" dirty="0"/>
+              <a:t>Gemini API </a:t>
+            </a:r>
+            <a:r>
+              <a:rPr kumimoji="1" lang="ja-JP" altLang="en-US" dirty="0"/>
+              <a:t>を活用し、問い合わせ内容を自動解析する。</a:t>
+            </a:r>
+          </a:p>
+          <a:p>
+            <a:endParaRPr kumimoji="1" lang="ja-JP" altLang="en-US" dirty="0"/>
+          </a:p>
+          <a:p>
+            <a:pPr marL="285750" indent="-285750">
               <a:buFont typeface="Wingdings" panose="05000000000000000000" pitchFamily="2" charset="2"/>
               <a:buChar char="l"/>
             </a:pPr>
-            <a:endParaRPr lang="en-US" altLang="ja-JP" sz="2000" dirty="0"/>
-          </a:p>
-          <a:p>
-            <a:pPr marL="342900" indent="-342900">
+            <a:r>
+              <a:rPr kumimoji="1" lang="ja-JP" altLang="en-US" dirty="0"/>
+              <a:t>問い合わせカテゴリーの自動判定</a:t>
+            </a:r>
+          </a:p>
+          <a:p>
+            <a:pPr marL="285750" indent="-285750">
               <a:buFont typeface="Wingdings" panose="05000000000000000000" pitchFamily="2" charset="2"/>
               <a:buChar char="l"/>
             </a:pPr>
             <a:r>
-              <a:rPr lang="en-US" altLang="ja-JP" sz="2000" dirty="0"/>
-              <a:t>AI </a:t>
-            </a:r>
-            <a:r>
-              <a:rPr lang="ja-JP" altLang="en-US" sz="2000" dirty="0"/>
-              <a:t>による回答案の自動生成</a:t>
-            </a:r>
-            <a:endParaRPr lang="en-US" altLang="ja-JP" sz="2000" dirty="0"/>
-          </a:p>
-          <a:p>
-            <a:pPr marL="342900" indent="-342900">
+              <a:rPr kumimoji="1" lang="ja-JP" altLang="en-US" dirty="0"/>
+              <a:t>緊急度の自動判定</a:t>
+            </a:r>
+          </a:p>
+          <a:p>
+            <a:pPr marL="285750" indent="-285750">
               <a:buFont typeface="Wingdings" panose="05000000000000000000" pitchFamily="2" charset="2"/>
               <a:buChar char="l"/>
             </a:pPr>
-            <a:endParaRPr lang="en-US" altLang="ja-JP" sz="2000" dirty="0"/>
-          </a:p>
-          <a:p>
-            <a:pPr marL="342900" indent="-342900">
-              <a:buFont typeface="Wingdings" panose="05000000000000000000" pitchFamily="2" charset="2"/>
-              <a:buChar char="l"/>
-            </a:pPr>
-            <a:r>
-              <a:rPr lang="ja-JP" altLang="en-US" sz="2000" dirty="0"/>
-              <a:t>問い合わせ情報の保存・一覧取得・詳細取得機能</a:t>
-            </a:r>
-            <a:endParaRPr lang="en-US" altLang="ja-JP" sz="2000" dirty="0"/>
-          </a:p>
-          <a:p>
-            <a:pPr marL="342900" indent="-342900">
-              <a:buFont typeface="Wingdings" panose="05000000000000000000" pitchFamily="2" charset="2"/>
-              <a:buChar char="l"/>
-            </a:pPr>
-            <a:endParaRPr lang="en-US" altLang="ja-JP" sz="2000" dirty="0"/>
-          </a:p>
-          <a:p>
-            <a:pPr marL="342900" indent="-342900">
-              <a:buFont typeface="Wingdings" panose="05000000000000000000" pitchFamily="2" charset="2"/>
-              <a:buChar char="l"/>
-            </a:pPr>
-            <a:r>
-              <a:rPr lang="en-US" altLang="ja-JP" sz="2000" dirty="0"/>
-              <a:t>JSON </a:t>
-            </a:r>
-            <a:r>
-              <a:rPr lang="ja-JP" altLang="en-US" sz="2000" dirty="0"/>
-              <a:t>形式でのデータ処理およびバリデーション</a:t>
-            </a:r>
-            <a:endParaRPr lang="en-US" altLang="ja-JP" sz="2000" dirty="0"/>
-          </a:p>
-          <a:p>
-            <a:pPr marL="342900" indent="-342900">
-              <a:buFont typeface="Wingdings" panose="05000000000000000000" pitchFamily="2" charset="2"/>
-              <a:buChar char="l"/>
-            </a:pPr>
-            <a:endParaRPr lang="en-US" altLang="ja-JP" sz="2000" dirty="0"/>
-          </a:p>
-          <a:p>
-            <a:pPr marL="342900" indent="-342900">
-              <a:buFont typeface="Wingdings" panose="05000000000000000000" pitchFamily="2" charset="2"/>
-              <a:buChar char="l"/>
-            </a:pPr>
-            <a:r>
-              <a:rPr lang="ja-JP" altLang="en-US" sz="2000" dirty="0"/>
-              <a:t>エラーハンドリングによる安全な </a:t>
-            </a:r>
-            <a:r>
-              <a:rPr lang="en-US" altLang="ja-JP" sz="2000" dirty="0"/>
-              <a:t>API </a:t>
-            </a:r>
-            <a:r>
-              <a:rPr lang="ja-JP" altLang="en-US" sz="2000" dirty="0"/>
-              <a:t>処理</a:t>
-            </a:r>
-            <a:endParaRPr lang="en-US" altLang="ja-JP" sz="2000" dirty="0"/>
-          </a:p>
-          <a:p>
-            <a:pPr marL="342900" indent="-342900">
-              <a:buFont typeface="Wingdings" panose="05000000000000000000" pitchFamily="2" charset="2"/>
-              <a:buChar char="l"/>
-            </a:pPr>
-            <a:endParaRPr lang="en-US" altLang="ja-JP" sz="2000" dirty="0"/>
+            <a:r>
+              <a:rPr kumimoji="1" lang="ja-JP" altLang="en-US" dirty="0"/>
+              <a:t>回答案の自動生成</a:t>
+            </a:r>
           </a:p>
         </p:txBody>
       </p:sp>
@@ -5915,7 +5949,7 @@
           <a:p>
             <a:r>
               <a:rPr lang="en-US" altLang="ja-JP" sz="2000" dirty="0"/>
-              <a:t>3. JSON</a:t>
+              <a:t>3.    JSON</a:t>
             </a:r>
             <a:r>
               <a:rPr lang="ja-JP" altLang="en-US" sz="2000" dirty="0"/>
@@ -5929,7 +5963,7 @@
           <a:p>
             <a:r>
               <a:rPr lang="ja-JP" altLang="en-US" sz="2000" dirty="0"/>
-              <a:t>主に実装したメソッド</a:t>
+              <a:t>実装したメソッド</a:t>
             </a:r>
             <a:endParaRPr lang="en-US" altLang="ja-JP" sz="2000" dirty="0"/>
           </a:p>
@@ -5940,7 +5974,7 @@
             </a:pPr>
             <a:r>
               <a:rPr lang="en-US" altLang="ja-JP" sz="2000" dirty="0"/>
-              <a:t>def _load()</a:t>
+              <a:t>_load()</a:t>
             </a:r>
             <a:r>
               <a:rPr lang="ja-JP" altLang="en-US" sz="2000" dirty="0"/>
@@ -5978,7 +6012,7 @@
             </a:pPr>
             <a:r>
               <a:rPr lang="en-US" altLang="ja-JP" sz="2000" dirty="0"/>
-              <a:t>def _save() : JSON </a:t>
+              <a:t>_save() : JSON </a:t>
             </a:r>
             <a:r>
               <a:rPr lang="ja-JP" altLang="en-US" sz="2000" dirty="0"/>
@@ -5999,10 +6033,6 @@
               <a:buChar char="l"/>
             </a:pPr>
             <a:r>
-              <a:rPr lang="en-US" altLang="ja-JP" sz="2000" dirty="0"/>
-              <a:t>def </a:t>
-            </a:r>
-            <a:r>
               <a:rPr lang="en-US" altLang="ja-JP" sz="2000" dirty="0" err="1"/>
               <a:t>save_inquiry</a:t>
             </a:r>
@@ -6029,10 +6059,6 @@
               <a:buChar char="l"/>
             </a:pPr>
             <a:r>
-              <a:rPr lang="en-US" altLang="ja-JP" sz="2000" dirty="0"/>
-              <a:t>def </a:t>
-            </a:r>
-            <a:r>
               <a:rPr lang="en-US" altLang="ja-JP" sz="2000" dirty="0" err="1"/>
               <a:t>get_all_inquiries</a:t>
             </a:r>
@@ -6058,10 +6084,6 @@
               <a:buFont typeface="Wingdings" panose="05000000000000000000" pitchFamily="2" charset="2"/>
               <a:buChar char="l"/>
             </a:pPr>
-            <a:r>
-              <a:rPr lang="en-US" altLang="ja-JP" sz="2000" dirty="0"/>
-              <a:t>def </a:t>
-            </a:r>
             <a:r>
               <a:rPr lang="en-US" altLang="ja-JP" sz="2000" dirty="0" err="1"/>
               <a:t>get_inquiry_by_id</a:t>
@@ -6116,12 +6138,20 @@
           <a:p>
             <a:pPr algn="ctr"/>
             <a:r>
+              <a:rPr lang="en-US" altLang="ja-JP" sz="2400" b="1" dirty="0">
+                <a:solidFill>
+                  <a:srgbClr val="FF0000"/>
+                </a:solidFill>
+              </a:rPr>
+              <a:t>*</a:t>
+            </a:r>
+            <a:r>
               <a:rPr lang="ja-JP" altLang="en-US" sz="2400" b="1" dirty="0">
                 <a:solidFill>
                   <a:srgbClr val="FF0000"/>
                 </a:solidFill>
               </a:rPr>
-              <a:t>過去の回答は保存され、参照可能となる</a:t>
+              <a:t>過去の回答は永続的に保存され、参照可能となる</a:t>
             </a:r>
             <a:endParaRPr kumimoji="1" lang="ja-JP" altLang="en-US" sz="2400" b="1" dirty="0">
               <a:solidFill>
@@ -6290,7 +6320,7 @@
         </p:nvSpPr>
         <p:spPr>
           <a:xfrm>
-            <a:off x="813480" y="3198167"/>
+            <a:off x="813480" y="3429000"/>
             <a:ext cx="10565040" cy="584775"/>
           </a:xfrm>
           <a:prstGeom prst="rect">
@@ -6451,7 +6481,7 @@
           <a:p>
             <a:r>
               <a:rPr lang="en-US" altLang="ja-JP" sz="2400" b="1" dirty="0"/>
-              <a:t>1.1 </a:t>
+              <a:t>2.    </a:t>
             </a:r>
             <a:r>
               <a:rPr lang="ja-JP" altLang="en-US" sz="2400" b="1" dirty="0"/>
@@ -6476,7 +6506,7 @@
         <p:spPr>
           <a:xfrm>
             <a:off x="320675" y="2024861"/>
-            <a:ext cx="10668000" cy="4524315"/>
+            <a:ext cx="10668000" cy="4247317"/>
           </a:xfrm>
           <a:prstGeom prst="rect">
             <a:avLst/>
@@ -6490,8 +6520,62 @@
           <a:lstStyle/>
           <a:p>
             <a:r>
-              <a:rPr kumimoji="1" lang="ja-JP" altLang="en-US" dirty="0"/>
-              <a:t>システム開発にあるべき姿勢</a:t>
+              <a:rPr lang="ja-JP" altLang="en-US" dirty="0"/>
+              <a:t>システム開発の基本姿勢</a:t>
+            </a:r>
+            <a:endParaRPr lang="en-US" altLang="ja-JP" dirty="0"/>
+          </a:p>
+          <a:p>
+            <a:endParaRPr lang="en-US" altLang="ja-JP" dirty="0"/>
+          </a:p>
+          <a:p>
+            <a:r>
+              <a:rPr lang="ja-JP" altLang="en-US" dirty="0"/>
+              <a:t>上流工程の重要性</a:t>
+            </a:r>
+            <a:endParaRPr lang="en-US" altLang="ja-JP" dirty="0"/>
+          </a:p>
+          <a:p>
+            <a:endParaRPr lang="en-US" altLang="ja-JP" dirty="0"/>
+          </a:p>
+          <a:p>
+            <a:r>
+              <a:rPr lang="ja-JP" altLang="en-US" dirty="0"/>
+              <a:t>工数・スケジュール管理</a:t>
+            </a:r>
+            <a:endParaRPr lang="en-US" altLang="ja-JP" dirty="0"/>
+          </a:p>
+          <a:p>
+            <a:endParaRPr lang="en-US" altLang="ja-JP" dirty="0"/>
+          </a:p>
+          <a:p>
+            <a:r>
+              <a:rPr lang="ja-JP" altLang="en-US" dirty="0"/>
+              <a:t>要件と設計の関係</a:t>
+            </a:r>
+            <a:endParaRPr lang="en-US" altLang="ja-JP" dirty="0"/>
+          </a:p>
+          <a:p>
+            <a:endParaRPr lang="en-US" altLang="ja-JP" dirty="0"/>
+          </a:p>
+          <a:p>
+            <a:r>
+              <a:rPr lang="ja-JP" altLang="en-US" dirty="0"/>
+              <a:t>設計・説明力</a:t>
+            </a:r>
+            <a:endParaRPr lang="en-US" altLang="ja-JP" dirty="0"/>
+          </a:p>
+          <a:p>
+            <a:endParaRPr lang="en-US" altLang="ja-JP" dirty="0"/>
+          </a:p>
+          <a:p>
+            <a:r>
+              <a:rPr lang="en-US" altLang="ja-JP" dirty="0"/>
+              <a:t>AI</a:t>
+            </a:r>
+            <a:r>
+              <a:rPr lang="ja-JP" altLang="en-US" dirty="0"/>
+              <a:t>の活用方法</a:t>
             </a:r>
             <a:endParaRPr kumimoji="1" lang="en-US" altLang="ja-JP" dirty="0"/>
           </a:p>
@@ -6500,72 +6584,18 @@
           </a:p>
           <a:p>
             <a:r>
-              <a:rPr kumimoji="1" lang="ja-JP" altLang="en-US" dirty="0"/>
-              <a:t>実装時にかかる所有時間</a:t>
-            </a:r>
-            <a:endParaRPr kumimoji="1" lang="en-US" altLang="ja-JP" dirty="0"/>
-          </a:p>
-          <a:p>
+              <a:rPr lang="ja-JP" altLang="en-US" dirty="0"/>
+              <a:t>プロジェクト意識</a:t>
+            </a:r>
             <a:endParaRPr lang="en-US" altLang="ja-JP" dirty="0"/>
           </a:p>
           <a:p>
-            <a:r>
-              <a:rPr kumimoji="1" lang="ja-JP" altLang="en-US" dirty="0"/>
-              <a:t>上流工程の大切さ・流れ</a:t>
-            </a:r>
-            <a:endParaRPr kumimoji="1" lang="en-US" altLang="ja-JP" dirty="0"/>
-          </a:p>
-          <a:p>
             <a:endParaRPr lang="en-US" altLang="ja-JP" dirty="0"/>
           </a:p>
           <a:p>
             <a:r>
-              <a:rPr kumimoji="1" lang="ja-JP" altLang="en-US" dirty="0"/>
-              <a:t>お客さんの要求書の範囲で異なる設計書を行うこと</a:t>
-            </a:r>
-            <a:endParaRPr kumimoji="1" lang="en-US" altLang="ja-JP" dirty="0"/>
-          </a:p>
-          <a:p>
-            <a:endParaRPr lang="en-US" altLang="ja-JP" dirty="0"/>
-          </a:p>
-          <a:p>
-            <a:r>
-              <a:rPr kumimoji="1" lang="ja-JP" altLang="en-US" dirty="0"/>
-              <a:t>設計書の提案・説明を明確にすること</a:t>
-            </a:r>
-            <a:endParaRPr kumimoji="1" lang="en-US" altLang="ja-JP" dirty="0"/>
-          </a:p>
-          <a:p>
-            <a:endParaRPr lang="en-US" altLang="ja-JP" dirty="0"/>
-          </a:p>
-          <a:p>
-            <a:r>
-              <a:rPr kumimoji="1" lang="en-US" altLang="ja-JP" dirty="0"/>
-              <a:t>AI</a:t>
-            </a:r>
-            <a:r>
-              <a:rPr kumimoji="1" lang="ja-JP" altLang="en-US" dirty="0"/>
-              <a:t>の扱い方</a:t>
-            </a:r>
-            <a:endParaRPr kumimoji="1" lang="en-US" altLang="ja-JP" dirty="0"/>
-          </a:p>
-          <a:p>
-            <a:endParaRPr lang="en-US" altLang="ja-JP" dirty="0"/>
-          </a:p>
-          <a:p>
-            <a:r>
               <a:rPr lang="ja-JP" altLang="en-US" dirty="0"/>
-              <a:t>プロジェクトに対する企画性</a:t>
-            </a:r>
-            <a:endParaRPr kumimoji="1" lang="en-US" altLang="ja-JP" dirty="0"/>
-          </a:p>
-          <a:p>
-            <a:endParaRPr lang="en-US" altLang="ja-JP" dirty="0"/>
-          </a:p>
-          <a:p>
-            <a:r>
-              <a:rPr lang="ja-JP" altLang="en-US" dirty="0"/>
-              <a:t>システムの中では</a:t>
+              <a:t>技術面（</a:t>
             </a:r>
             <a:r>
               <a:rPr lang="en-US" altLang="ja-JP" dirty="0"/>
@@ -6573,12 +6603,9 @@
             </a:r>
             <a:r>
               <a:rPr lang="ja-JP" altLang="en-US" dirty="0"/>
-              <a:t>の関数・メソッド・処理順番・優先度順位・バグやエラー対応</a:t>
+              <a:t>）</a:t>
             </a:r>
             <a:endParaRPr lang="en-US" altLang="ja-JP" dirty="0"/>
-          </a:p>
-          <a:p>
-            <a:endParaRPr kumimoji="1" lang="ja-JP" altLang="en-US" dirty="0"/>
           </a:p>
         </p:txBody>
       </p:sp>
